--- a/bright-39-palette-type.pptx
+++ b/bright-39-palette-type.pptx
@@ -3088,20 +3088,12 @@
         <p:nvPr/>
       </p:nvGrpSpPr>
       <p:grpSpPr/>
-      <p:pic>
-        <p:nvPicPr>
-          <p:cNvPr id="2" name="Picture 1" descr="bright-39-palette-type.png"/>
-          <p:cNvPicPr>
-            <a:picLocks noChangeAspect="1"/>
-          </p:cNvPicPr>
+      <p:sp>
+        <p:nvSpPr>
+          <p:cNvPr id="2" name="Rectangle 1"/>
+          <p:cNvSpPr/>
           <p:nvPr/>
-        </p:nvPicPr>
-        <p:blipFill>
-          <a:blip r:embed="rId2"/>
-          <a:stretch>
-            <a:fillRect/>
-          </a:stretch>
-        </p:blipFill>
+        </p:nvSpPr>
         <p:spPr>
           <a:xfrm>
             <a:off x="0" y="0"/>
@@ -3110,8 +3102,2013 @@
           <a:prstGeom prst="rect">
             <a:avLst/>
           </a:prstGeom>
-        </p:spPr>
-      </p:pic>
+          <a:solidFill>
+            <a:srgbClr val="FBFAF7"/>
+          </a:solidFill>
+          <a:ln>
+            <a:noFill/>
+          </a:ln>
+          <a:effectLst/>
+        </p:spPr>
+        <p:style>
+          <a:lnRef idx="1">
+            <a:schemeClr val="accent1"/>
+          </a:lnRef>
+          <a:fillRef idx="3">
+            <a:schemeClr val="accent1"/>
+          </a:fillRef>
+          <a:effectRef idx="2">
+            <a:schemeClr val="accent1"/>
+          </a:effectRef>
+          <a:fontRef idx="minor">
+            <a:schemeClr val="lt1"/>
+          </a:fontRef>
+        </p:style>
+        <p:txBody>
+          <a:bodyPr rtlCol="0" anchor="ctr"/>
+          <a:lstStyle/>
+          <a:p>
+            <a:pPr algn="ctr"/>
+          </a:p>
+        </p:txBody>
+      </p:sp>
+      <p:sp>
+        <p:nvSpPr>
+          <p:cNvPr id="3" name="Rectangle 2"/>
+          <p:cNvSpPr/>
+          <p:nvPr/>
+        </p:nvSpPr>
+        <p:spPr>
+          <a:xfrm>
+            <a:off x="3739753" y="885825"/>
+            <a:ext cx="571500" cy="9525"/>
+          </a:xfrm>
+          <a:prstGeom prst="rect">
+            <a:avLst/>
+          </a:prstGeom>
+          <a:solidFill>
+            <a:srgbClr val="97A98C"/>
+          </a:solidFill>
+          <a:ln>
+            <a:noFill/>
+          </a:ln>
+          <a:effectLst/>
+        </p:spPr>
+        <p:style>
+          <a:lnRef idx="1">
+            <a:schemeClr val="accent1"/>
+          </a:lnRef>
+          <a:fillRef idx="3">
+            <a:schemeClr val="accent1"/>
+          </a:fillRef>
+          <a:effectRef idx="2">
+            <a:schemeClr val="accent1"/>
+          </a:effectRef>
+          <a:fontRef idx="minor">
+            <a:schemeClr val="lt1"/>
+          </a:fontRef>
+        </p:style>
+        <p:txBody>
+          <a:bodyPr rtlCol="0" anchor="ctr"/>
+          <a:lstStyle/>
+          <a:p>
+            <a:pPr algn="ctr"/>
+          </a:p>
+        </p:txBody>
+      </p:sp>
+      <p:sp>
+        <p:nvSpPr>
+          <p:cNvPr id="4" name="Rectangle 3"/>
+          <p:cNvSpPr/>
+          <p:nvPr/>
+        </p:nvSpPr>
+        <p:spPr>
+          <a:xfrm>
+            <a:off x="5975747" y="885825"/>
+            <a:ext cx="571500" cy="9525"/>
+          </a:xfrm>
+          <a:prstGeom prst="rect">
+            <a:avLst/>
+          </a:prstGeom>
+          <a:solidFill>
+            <a:srgbClr val="97A98C"/>
+          </a:solidFill>
+          <a:ln>
+            <a:noFill/>
+          </a:ln>
+          <a:effectLst/>
+        </p:spPr>
+        <p:style>
+          <a:lnRef idx="1">
+            <a:schemeClr val="accent1"/>
+          </a:lnRef>
+          <a:fillRef idx="3">
+            <a:schemeClr val="accent1"/>
+          </a:fillRef>
+          <a:effectRef idx="2">
+            <a:schemeClr val="accent1"/>
+          </a:effectRef>
+          <a:fontRef idx="minor">
+            <a:schemeClr val="lt1"/>
+          </a:fontRef>
+        </p:style>
+        <p:txBody>
+          <a:bodyPr rtlCol="0" anchor="ctr"/>
+          <a:lstStyle/>
+          <a:p>
+            <a:pPr algn="ctr"/>
+          </a:p>
+        </p:txBody>
+      </p:sp>
+      <p:sp>
+        <p:nvSpPr>
+          <p:cNvPr id="5" name="Rectangle 4"/>
+          <p:cNvSpPr/>
+          <p:nvPr/>
+        </p:nvSpPr>
+        <p:spPr>
+          <a:xfrm>
+            <a:off x="762000" y="2157412"/>
+            <a:ext cx="1317575" cy="857250"/>
+          </a:xfrm>
+          <a:prstGeom prst="rect">
+            <a:avLst/>
+          </a:prstGeom>
+          <a:solidFill>
+            <a:srgbClr val="FBFAF7"/>
+          </a:solidFill>
+          <a:ln>
+            <a:noFill/>
+          </a:ln>
+          <a:effectLst/>
+        </p:spPr>
+        <p:style>
+          <a:lnRef idx="1">
+            <a:schemeClr val="accent1"/>
+          </a:lnRef>
+          <a:fillRef idx="3">
+            <a:schemeClr val="accent1"/>
+          </a:fillRef>
+          <a:effectRef idx="2">
+            <a:schemeClr val="accent1"/>
+          </a:effectRef>
+          <a:fontRef idx="minor">
+            <a:schemeClr val="lt1"/>
+          </a:fontRef>
+        </p:style>
+        <p:txBody>
+          <a:bodyPr rtlCol="0" anchor="ctr"/>
+          <a:lstStyle/>
+          <a:p>
+            <a:pPr algn="ctr"/>
+          </a:p>
+        </p:txBody>
+      </p:sp>
+      <p:sp>
+        <p:nvSpPr>
+          <p:cNvPr id="6" name="Rectangle 5"/>
+          <p:cNvSpPr/>
+          <p:nvPr/>
+        </p:nvSpPr>
+        <p:spPr>
+          <a:xfrm>
+            <a:off x="762000" y="2157412"/>
+            <a:ext cx="1317575" cy="9525"/>
+          </a:xfrm>
+          <a:prstGeom prst="rect">
+            <a:avLst/>
+          </a:prstGeom>
+          <a:solidFill>
+            <a:srgbClr val="DDE2D7"/>
+          </a:solidFill>
+          <a:ln>
+            <a:noFill/>
+          </a:ln>
+          <a:effectLst/>
+        </p:spPr>
+        <p:style>
+          <a:lnRef idx="1">
+            <a:schemeClr val="accent1"/>
+          </a:lnRef>
+          <a:fillRef idx="3">
+            <a:schemeClr val="accent1"/>
+          </a:fillRef>
+          <a:effectRef idx="2">
+            <a:schemeClr val="accent1"/>
+          </a:effectRef>
+          <a:fontRef idx="minor">
+            <a:schemeClr val="lt1"/>
+          </a:fontRef>
+        </p:style>
+        <p:txBody>
+          <a:bodyPr rtlCol="0" anchor="ctr"/>
+          <a:lstStyle/>
+          <a:p>
+            <a:pPr algn="ctr"/>
+          </a:p>
+        </p:txBody>
+      </p:sp>
+      <p:sp>
+        <p:nvSpPr>
+          <p:cNvPr id="7" name="Rectangle 6"/>
+          <p:cNvSpPr/>
+          <p:nvPr/>
+        </p:nvSpPr>
+        <p:spPr>
+          <a:xfrm>
+            <a:off x="762000" y="3005138"/>
+            <a:ext cx="1317575" cy="9525"/>
+          </a:xfrm>
+          <a:prstGeom prst="rect">
+            <a:avLst/>
+          </a:prstGeom>
+          <a:solidFill>
+            <a:srgbClr val="DDE2D7"/>
+          </a:solidFill>
+          <a:ln>
+            <a:noFill/>
+          </a:ln>
+          <a:effectLst/>
+        </p:spPr>
+        <p:style>
+          <a:lnRef idx="1">
+            <a:schemeClr val="accent1"/>
+          </a:lnRef>
+          <a:fillRef idx="3">
+            <a:schemeClr val="accent1"/>
+          </a:fillRef>
+          <a:effectRef idx="2">
+            <a:schemeClr val="accent1"/>
+          </a:effectRef>
+          <a:fontRef idx="minor">
+            <a:schemeClr val="lt1"/>
+          </a:fontRef>
+        </p:style>
+        <p:txBody>
+          <a:bodyPr rtlCol="0" anchor="ctr"/>
+          <a:lstStyle/>
+          <a:p>
+            <a:pPr algn="ctr"/>
+          </a:p>
+        </p:txBody>
+      </p:sp>
+      <p:sp>
+        <p:nvSpPr>
+          <p:cNvPr id="8" name="Rectangle 7"/>
+          <p:cNvSpPr/>
+          <p:nvPr/>
+        </p:nvSpPr>
+        <p:spPr>
+          <a:xfrm>
+            <a:off x="762000" y="2157412"/>
+            <a:ext cx="9525" cy="857250"/>
+          </a:xfrm>
+          <a:prstGeom prst="rect">
+            <a:avLst/>
+          </a:prstGeom>
+          <a:solidFill>
+            <a:srgbClr val="DDE2D7"/>
+          </a:solidFill>
+          <a:ln>
+            <a:noFill/>
+          </a:ln>
+          <a:effectLst/>
+        </p:spPr>
+        <p:style>
+          <a:lnRef idx="1">
+            <a:schemeClr val="accent1"/>
+          </a:lnRef>
+          <a:fillRef idx="3">
+            <a:schemeClr val="accent1"/>
+          </a:fillRef>
+          <a:effectRef idx="2">
+            <a:schemeClr val="accent1"/>
+          </a:effectRef>
+          <a:fontRef idx="minor">
+            <a:schemeClr val="lt1"/>
+          </a:fontRef>
+        </p:style>
+        <p:txBody>
+          <a:bodyPr rtlCol="0" anchor="ctr"/>
+          <a:lstStyle/>
+          <a:p>
+            <a:pPr algn="ctr"/>
+          </a:p>
+        </p:txBody>
+      </p:sp>
+      <p:sp>
+        <p:nvSpPr>
+          <p:cNvPr id="9" name="Rectangle 8"/>
+          <p:cNvSpPr/>
+          <p:nvPr/>
+        </p:nvSpPr>
+        <p:spPr>
+          <a:xfrm>
+            <a:off x="2070050" y="2157412"/>
+            <a:ext cx="9525" cy="857250"/>
+          </a:xfrm>
+          <a:prstGeom prst="rect">
+            <a:avLst/>
+          </a:prstGeom>
+          <a:solidFill>
+            <a:srgbClr val="DDE2D7"/>
+          </a:solidFill>
+          <a:ln>
+            <a:noFill/>
+          </a:ln>
+          <a:effectLst/>
+        </p:spPr>
+        <p:style>
+          <a:lnRef idx="1">
+            <a:schemeClr val="accent1"/>
+          </a:lnRef>
+          <a:fillRef idx="3">
+            <a:schemeClr val="accent1"/>
+          </a:fillRef>
+          <a:effectRef idx="2">
+            <a:schemeClr val="accent1"/>
+          </a:effectRef>
+          <a:fontRef idx="minor">
+            <a:schemeClr val="lt1"/>
+          </a:fontRef>
+        </p:style>
+        <p:txBody>
+          <a:bodyPr rtlCol="0" anchor="ctr"/>
+          <a:lstStyle/>
+          <a:p>
+            <a:pPr algn="ctr"/>
+          </a:p>
+        </p:txBody>
+      </p:sp>
+      <p:sp>
+        <p:nvSpPr>
+          <p:cNvPr id="10" name="Rectangle 9"/>
+          <p:cNvSpPr/>
+          <p:nvPr/>
+        </p:nvSpPr>
+        <p:spPr>
+          <a:xfrm>
+            <a:off x="2251025" y="2157412"/>
+            <a:ext cx="1317575" cy="857250"/>
+          </a:xfrm>
+          <a:prstGeom prst="rect">
+            <a:avLst/>
+          </a:prstGeom>
+          <a:solidFill>
+            <a:srgbClr val="EDE7DD"/>
+          </a:solidFill>
+          <a:ln>
+            <a:noFill/>
+          </a:ln>
+          <a:effectLst/>
+        </p:spPr>
+        <p:style>
+          <a:lnRef idx="1">
+            <a:schemeClr val="accent1"/>
+          </a:lnRef>
+          <a:fillRef idx="3">
+            <a:schemeClr val="accent1"/>
+          </a:fillRef>
+          <a:effectRef idx="2">
+            <a:schemeClr val="accent1"/>
+          </a:effectRef>
+          <a:fontRef idx="minor">
+            <a:schemeClr val="lt1"/>
+          </a:fontRef>
+        </p:style>
+        <p:txBody>
+          <a:bodyPr rtlCol="0" anchor="ctr"/>
+          <a:lstStyle/>
+          <a:p>
+            <a:pPr algn="ctr"/>
+          </a:p>
+        </p:txBody>
+      </p:sp>
+      <p:sp>
+        <p:nvSpPr>
+          <p:cNvPr id="11" name="Rectangle 10"/>
+          <p:cNvSpPr/>
+          <p:nvPr/>
+        </p:nvSpPr>
+        <p:spPr>
+          <a:xfrm>
+            <a:off x="2251025" y="2157412"/>
+            <a:ext cx="1317575" cy="9525"/>
+          </a:xfrm>
+          <a:prstGeom prst="rect">
+            <a:avLst/>
+          </a:prstGeom>
+          <a:solidFill>
+            <a:srgbClr val="DDE2D7"/>
+          </a:solidFill>
+          <a:ln>
+            <a:noFill/>
+          </a:ln>
+          <a:effectLst/>
+        </p:spPr>
+        <p:style>
+          <a:lnRef idx="1">
+            <a:schemeClr val="accent1"/>
+          </a:lnRef>
+          <a:fillRef idx="3">
+            <a:schemeClr val="accent1"/>
+          </a:fillRef>
+          <a:effectRef idx="2">
+            <a:schemeClr val="accent1"/>
+          </a:effectRef>
+          <a:fontRef idx="minor">
+            <a:schemeClr val="lt1"/>
+          </a:fontRef>
+        </p:style>
+        <p:txBody>
+          <a:bodyPr rtlCol="0" anchor="ctr"/>
+          <a:lstStyle/>
+          <a:p>
+            <a:pPr algn="ctr"/>
+          </a:p>
+        </p:txBody>
+      </p:sp>
+      <p:sp>
+        <p:nvSpPr>
+          <p:cNvPr id="12" name="Rectangle 11"/>
+          <p:cNvSpPr/>
+          <p:nvPr/>
+        </p:nvSpPr>
+        <p:spPr>
+          <a:xfrm>
+            <a:off x="2251025" y="3005138"/>
+            <a:ext cx="1317575" cy="9525"/>
+          </a:xfrm>
+          <a:prstGeom prst="rect">
+            <a:avLst/>
+          </a:prstGeom>
+          <a:solidFill>
+            <a:srgbClr val="DDE2D7"/>
+          </a:solidFill>
+          <a:ln>
+            <a:noFill/>
+          </a:ln>
+          <a:effectLst/>
+        </p:spPr>
+        <p:style>
+          <a:lnRef idx="1">
+            <a:schemeClr val="accent1"/>
+          </a:lnRef>
+          <a:fillRef idx="3">
+            <a:schemeClr val="accent1"/>
+          </a:fillRef>
+          <a:effectRef idx="2">
+            <a:schemeClr val="accent1"/>
+          </a:effectRef>
+          <a:fontRef idx="minor">
+            <a:schemeClr val="lt1"/>
+          </a:fontRef>
+        </p:style>
+        <p:txBody>
+          <a:bodyPr rtlCol="0" anchor="ctr"/>
+          <a:lstStyle/>
+          <a:p>
+            <a:pPr algn="ctr"/>
+          </a:p>
+        </p:txBody>
+      </p:sp>
+      <p:sp>
+        <p:nvSpPr>
+          <p:cNvPr id="13" name="Rectangle 12"/>
+          <p:cNvSpPr/>
+          <p:nvPr/>
+        </p:nvSpPr>
+        <p:spPr>
+          <a:xfrm>
+            <a:off x="2251025" y="2157412"/>
+            <a:ext cx="9525" cy="857250"/>
+          </a:xfrm>
+          <a:prstGeom prst="rect">
+            <a:avLst/>
+          </a:prstGeom>
+          <a:solidFill>
+            <a:srgbClr val="DDE2D7"/>
+          </a:solidFill>
+          <a:ln>
+            <a:noFill/>
+          </a:ln>
+          <a:effectLst/>
+        </p:spPr>
+        <p:style>
+          <a:lnRef idx="1">
+            <a:schemeClr val="accent1"/>
+          </a:lnRef>
+          <a:fillRef idx="3">
+            <a:schemeClr val="accent1"/>
+          </a:fillRef>
+          <a:effectRef idx="2">
+            <a:schemeClr val="accent1"/>
+          </a:effectRef>
+          <a:fontRef idx="minor">
+            <a:schemeClr val="lt1"/>
+          </a:fontRef>
+        </p:style>
+        <p:txBody>
+          <a:bodyPr rtlCol="0" anchor="ctr"/>
+          <a:lstStyle/>
+          <a:p>
+            <a:pPr algn="ctr"/>
+          </a:p>
+        </p:txBody>
+      </p:sp>
+      <p:sp>
+        <p:nvSpPr>
+          <p:cNvPr id="14" name="Rectangle 13"/>
+          <p:cNvSpPr/>
+          <p:nvPr/>
+        </p:nvSpPr>
+        <p:spPr>
+          <a:xfrm>
+            <a:off x="3559076" y="2157412"/>
+            <a:ext cx="9525" cy="857250"/>
+          </a:xfrm>
+          <a:prstGeom prst="rect">
+            <a:avLst/>
+          </a:prstGeom>
+          <a:solidFill>
+            <a:srgbClr val="DDE2D7"/>
+          </a:solidFill>
+          <a:ln>
+            <a:noFill/>
+          </a:ln>
+          <a:effectLst/>
+        </p:spPr>
+        <p:style>
+          <a:lnRef idx="1">
+            <a:schemeClr val="accent1"/>
+          </a:lnRef>
+          <a:fillRef idx="3">
+            <a:schemeClr val="accent1"/>
+          </a:fillRef>
+          <a:effectRef idx="2">
+            <a:schemeClr val="accent1"/>
+          </a:effectRef>
+          <a:fontRef idx="minor">
+            <a:schemeClr val="lt1"/>
+          </a:fontRef>
+        </p:style>
+        <p:txBody>
+          <a:bodyPr rtlCol="0" anchor="ctr"/>
+          <a:lstStyle/>
+          <a:p>
+            <a:pPr algn="ctr"/>
+          </a:p>
+        </p:txBody>
+      </p:sp>
+      <p:sp>
+        <p:nvSpPr>
+          <p:cNvPr id="15" name="Rectangle 14"/>
+          <p:cNvSpPr/>
+          <p:nvPr/>
+        </p:nvSpPr>
+        <p:spPr>
+          <a:xfrm>
+            <a:off x="3740051" y="2157412"/>
+            <a:ext cx="1317575" cy="857250"/>
+          </a:xfrm>
+          <a:prstGeom prst="rect">
+            <a:avLst/>
+          </a:prstGeom>
+          <a:solidFill>
+            <a:srgbClr val="97A98C"/>
+          </a:solidFill>
+          <a:ln>
+            <a:noFill/>
+          </a:ln>
+          <a:effectLst/>
+        </p:spPr>
+        <p:style>
+          <a:lnRef idx="1">
+            <a:schemeClr val="accent1"/>
+          </a:lnRef>
+          <a:fillRef idx="3">
+            <a:schemeClr val="accent1"/>
+          </a:fillRef>
+          <a:effectRef idx="2">
+            <a:schemeClr val="accent1"/>
+          </a:effectRef>
+          <a:fontRef idx="minor">
+            <a:schemeClr val="lt1"/>
+          </a:fontRef>
+        </p:style>
+        <p:txBody>
+          <a:bodyPr rtlCol="0" anchor="ctr"/>
+          <a:lstStyle/>
+          <a:p>
+            <a:pPr algn="ctr"/>
+          </a:p>
+        </p:txBody>
+      </p:sp>
+      <p:sp>
+        <p:nvSpPr>
+          <p:cNvPr id="16" name="Rectangle 15"/>
+          <p:cNvSpPr/>
+          <p:nvPr/>
+        </p:nvSpPr>
+        <p:spPr>
+          <a:xfrm>
+            <a:off x="3740051" y="2157412"/>
+            <a:ext cx="1317575" cy="9525"/>
+          </a:xfrm>
+          <a:prstGeom prst="rect">
+            <a:avLst/>
+          </a:prstGeom>
+          <a:solidFill>
+            <a:srgbClr val="DDE2D7"/>
+          </a:solidFill>
+          <a:ln>
+            <a:noFill/>
+          </a:ln>
+          <a:effectLst/>
+        </p:spPr>
+        <p:style>
+          <a:lnRef idx="1">
+            <a:schemeClr val="accent1"/>
+          </a:lnRef>
+          <a:fillRef idx="3">
+            <a:schemeClr val="accent1"/>
+          </a:fillRef>
+          <a:effectRef idx="2">
+            <a:schemeClr val="accent1"/>
+          </a:effectRef>
+          <a:fontRef idx="minor">
+            <a:schemeClr val="lt1"/>
+          </a:fontRef>
+        </p:style>
+        <p:txBody>
+          <a:bodyPr rtlCol="0" anchor="ctr"/>
+          <a:lstStyle/>
+          <a:p>
+            <a:pPr algn="ctr"/>
+          </a:p>
+        </p:txBody>
+      </p:sp>
+      <p:sp>
+        <p:nvSpPr>
+          <p:cNvPr id="17" name="Rectangle 16"/>
+          <p:cNvSpPr/>
+          <p:nvPr/>
+        </p:nvSpPr>
+        <p:spPr>
+          <a:xfrm>
+            <a:off x="3740051" y="3005138"/>
+            <a:ext cx="1317575" cy="9525"/>
+          </a:xfrm>
+          <a:prstGeom prst="rect">
+            <a:avLst/>
+          </a:prstGeom>
+          <a:solidFill>
+            <a:srgbClr val="DDE2D7"/>
+          </a:solidFill>
+          <a:ln>
+            <a:noFill/>
+          </a:ln>
+          <a:effectLst/>
+        </p:spPr>
+        <p:style>
+          <a:lnRef idx="1">
+            <a:schemeClr val="accent1"/>
+          </a:lnRef>
+          <a:fillRef idx="3">
+            <a:schemeClr val="accent1"/>
+          </a:fillRef>
+          <a:effectRef idx="2">
+            <a:schemeClr val="accent1"/>
+          </a:effectRef>
+          <a:fontRef idx="minor">
+            <a:schemeClr val="lt1"/>
+          </a:fontRef>
+        </p:style>
+        <p:txBody>
+          <a:bodyPr rtlCol="0" anchor="ctr"/>
+          <a:lstStyle/>
+          <a:p>
+            <a:pPr algn="ctr"/>
+          </a:p>
+        </p:txBody>
+      </p:sp>
+      <p:sp>
+        <p:nvSpPr>
+          <p:cNvPr id="18" name="Rectangle 17"/>
+          <p:cNvSpPr/>
+          <p:nvPr/>
+        </p:nvSpPr>
+        <p:spPr>
+          <a:xfrm>
+            <a:off x="3740051" y="2157412"/>
+            <a:ext cx="9525" cy="857250"/>
+          </a:xfrm>
+          <a:prstGeom prst="rect">
+            <a:avLst/>
+          </a:prstGeom>
+          <a:solidFill>
+            <a:srgbClr val="DDE2D7"/>
+          </a:solidFill>
+          <a:ln>
+            <a:noFill/>
+          </a:ln>
+          <a:effectLst/>
+        </p:spPr>
+        <p:style>
+          <a:lnRef idx="1">
+            <a:schemeClr val="accent1"/>
+          </a:lnRef>
+          <a:fillRef idx="3">
+            <a:schemeClr val="accent1"/>
+          </a:fillRef>
+          <a:effectRef idx="2">
+            <a:schemeClr val="accent1"/>
+          </a:effectRef>
+          <a:fontRef idx="minor">
+            <a:schemeClr val="lt1"/>
+          </a:fontRef>
+        </p:style>
+        <p:txBody>
+          <a:bodyPr rtlCol="0" anchor="ctr"/>
+          <a:lstStyle/>
+          <a:p>
+            <a:pPr algn="ctr"/>
+          </a:p>
+        </p:txBody>
+      </p:sp>
+      <p:sp>
+        <p:nvSpPr>
+          <p:cNvPr id="19" name="Rectangle 18"/>
+          <p:cNvSpPr/>
+          <p:nvPr/>
+        </p:nvSpPr>
+        <p:spPr>
+          <a:xfrm>
+            <a:off x="5048101" y="2157412"/>
+            <a:ext cx="9525" cy="857250"/>
+          </a:xfrm>
+          <a:prstGeom prst="rect">
+            <a:avLst/>
+          </a:prstGeom>
+          <a:solidFill>
+            <a:srgbClr val="DDE2D7"/>
+          </a:solidFill>
+          <a:ln>
+            <a:noFill/>
+          </a:ln>
+          <a:effectLst/>
+        </p:spPr>
+        <p:style>
+          <a:lnRef idx="1">
+            <a:schemeClr val="accent1"/>
+          </a:lnRef>
+          <a:fillRef idx="3">
+            <a:schemeClr val="accent1"/>
+          </a:fillRef>
+          <a:effectRef idx="2">
+            <a:schemeClr val="accent1"/>
+          </a:effectRef>
+          <a:fontRef idx="minor">
+            <a:schemeClr val="lt1"/>
+          </a:fontRef>
+        </p:style>
+        <p:txBody>
+          <a:bodyPr rtlCol="0" anchor="ctr"/>
+          <a:lstStyle/>
+          <a:p>
+            <a:pPr algn="ctr"/>
+          </a:p>
+        </p:txBody>
+      </p:sp>
+      <p:sp>
+        <p:nvSpPr>
+          <p:cNvPr id="20" name="Rectangle 19"/>
+          <p:cNvSpPr/>
+          <p:nvPr/>
+        </p:nvSpPr>
+        <p:spPr>
+          <a:xfrm>
+            <a:off x="5229076" y="2157412"/>
+            <a:ext cx="1317724" cy="857250"/>
+          </a:xfrm>
+          <a:prstGeom prst="rect">
+            <a:avLst/>
+          </a:prstGeom>
+          <a:solidFill>
+            <a:srgbClr val="E6D2CB"/>
+          </a:solidFill>
+          <a:ln>
+            <a:noFill/>
+          </a:ln>
+          <a:effectLst/>
+        </p:spPr>
+        <p:style>
+          <a:lnRef idx="1">
+            <a:schemeClr val="accent1"/>
+          </a:lnRef>
+          <a:fillRef idx="3">
+            <a:schemeClr val="accent1"/>
+          </a:fillRef>
+          <a:effectRef idx="2">
+            <a:schemeClr val="accent1"/>
+          </a:effectRef>
+          <a:fontRef idx="minor">
+            <a:schemeClr val="lt1"/>
+          </a:fontRef>
+        </p:style>
+        <p:txBody>
+          <a:bodyPr rtlCol="0" anchor="ctr"/>
+          <a:lstStyle/>
+          <a:p>
+            <a:pPr algn="ctr"/>
+          </a:p>
+        </p:txBody>
+      </p:sp>
+      <p:sp>
+        <p:nvSpPr>
+          <p:cNvPr id="21" name="Rectangle 20"/>
+          <p:cNvSpPr/>
+          <p:nvPr/>
+        </p:nvSpPr>
+        <p:spPr>
+          <a:xfrm>
+            <a:off x="5229076" y="2157412"/>
+            <a:ext cx="1317724" cy="9525"/>
+          </a:xfrm>
+          <a:prstGeom prst="rect">
+            <a:avLst/>
+          </a:prstGeom>
+          <a:solidFill>
+            <a:srgbClr val="DDE2D7"/>
+          </a:solidFill>
+          <a:ln>
+            <a:noFill/>
+          </a:ln>
+          <a:effectLst/>
+        </p:spPr>
+        <p:style>
+          <a:lnRef idx="1">
+            <a:schemeClr val="accent1"/>
+          </a:lnRef>
+          <a:fillRef idx="3">
+            <a:schemeClr val="accent1"/>
+          </a:fillRef>
+          <a:effectRef idx="2">
+            <a:schemeClr val="accent1"/>
+          </a:effectRef>
+          <a:fontRef idx="minor">
+            <a:schemeClr val="lt1"/>
+          </a:fontRef>
+        </p:style>
+        <p:txBody>
+          <a:bodyPr rtlCol="0" anchor="ctr"/>
+          <a:lstStyle/>
+          <a:p>
+            <a:pPr algn="ctr"/>
+          </a:p>
+        </p:txBody>
+      </p:sp>
+      <p:sp>
+        <p:nvSpPr>
+          <p:cNvPr id="22" name="Rectangle 21"/>
+          <p:cNvSpPr/>
+          <p:nvPr/>
+        </p:nvSpPr>
+        <p:spPr>
+          <a:xfrm>
+            <a:off x="5229076" y="3005138"/>
+            <a:ext cx="1317724" cy="9525"/>
+          </a:xfrm>
+          <a:prstGeom prst="rect">
+            <a:avLst/>
+          </a:prstGeom>
+          <a:solidFill>
+            <a:srgbClr val="DDE2D7"/>
+          </a:solidFill>
+          <a:ln>
+            <a:noFill/>
+          </a:ln>
+          <a:effectLst/>
+        </p:spPr>
+        <p:style>
+          <a:lnRef idx="1">
+            <a:schemeClr val="accent1"/>
+          </a:lnRef>
+          <a:fillRef idx="3">
+            <a:schemeClr val="accent1"/>
+          </a:fillRef>
+          <a:effectRef idx="2">
+            <a:schemeClr val="accent1"/>
+          </a:effectRef>
+          <a:fontRef idx="minor">
+            <a:schemeClr val="lt1"/>
+          </a:fontRef>
+        </p:style>
+        <p:txBody>
+          <a:bodyPr rtlCol="0" anchor="ctr"/>
+          <a:lstStyle/>
+          <a:p>
+            <a:pPr algn="ctr"/>
+          </a:p>
+        </p:txBody>
+      </p:sp>
+      <p:sp>
+        <p:nvSpPr>
+          <p:cNvPr id="23" name="Rectangle 22"/>
+          <p:cNvSpPr/>
+          <p:nvPr/>
+        </p:nvSpPr>
+        <p:spPr>
+          <a:xfrm>
+            <a:off x="5229076" y="2157412"/>
+            <a:ext cx="9525" cy="857250"/>
+          </a:xfrm>
+          <a:prstGeom prst="rect">
+            <a:avLst/>
+          </a:prstGeom>
+          <a:solidFill>
+            <a:srgbClr val="DDE2D7"/>
+          </a:solidFill>
+          <a:ln>
+            <a:noFill/>
+          </a:ln>
+          <a:effectLst/>
+        </p:spPr>
+        <p:style>
+          <a:lnRef idx="1">
+            <a:schemeClr val="accent1"/>
+          </a:lnRef>
+          <a:fillRef idx="3">
+            <a:schemeClr val="accent1"/>
+          </a:fillRef>
+          <a:effectRef idx="2">
+            <a:schemeClr val="accent1"/>
+          </a:effectRef>
+          <a:fontRef idx="minor">
+            <a:schemeClr val="lt1"/>
+          </a:fontRef>
+        </p:style>
+        <p:txBody>
+          <a:bodyPr rtlCol="0" anchor="ctr"/>
+          <a:lstStyle/>
+          <a:p>
+            <a:pPr algn="ctr"/>
+          </a:p>
+        </p:txBody>
+      </p:sp>
+      <p:sp>
+        <p:nvSpPr>
+          <p:cNvPr id="24" name="Rectangle 23"/>
+          <p:cNvSpPr/>
+          <p:nvPr/>
+        </p:nvSpPr>
+        <p:spPr>
+          <a:xfrm>
+            <a:off x="6537275" y="2157412"/>
+            <a:ext cx="9525" cy="857250"/>
+          </a:xfrm>
+          <a:prstGeom prst="rect">
+            <a:avLst/>
+          </a:prstGeom>
+          <a:solidFill>
+            <a:srgbClr val="DDE2D7"/>
+          </a:solidFill>
+          <a:ln>
+            <a:noFill/>
+          </a:ln>
+          <a:effectLst/>
+        </p:spPr>
+        <p:style>
+          <a:lnRef idx="1">
+            <a:schemeClr val="accent1"/>
+          </a:lnRef>
+          <a:fillRef idx="3">
+            <a:schemeClr val="accent1"/>
+          </a:fillRef>
+          <a:effectRef idx="2">
+            <a:schemeClr val="accent1"/>
+          </a:effectRef>
+          <a:fontRef idx="minor">
+            <a:schemeClr val="lt1"/>
+          </a:fontRef>
+        </p:style>
+        <p:txBody>
+          <a:bodyPr rtlCol="0" anchor="ctr"/>
+          <a:lstStyle/>
+          <a:p>
+            <a:pPr algn="ctr"/>
+          </a:p>
+        </p:txBody>
+      </p:sp>
+      <p:sp>
+        <p:nvSpPr>
+          <p:cNvPr id="25" name="Rectangle 24"/>
+          <p:cNvSpPr/>
+          <p:nvPr/>
+        </p:nvSpPr>
+        <p:spPr>
+          <a:xfrm>
+            <a:off x="6718250" y="2157412"/>
+            <a:ext cx="1317575" cy="857250"/>
+          </a:xfrm>
+          <a:prstGeom prst="rect">
+            <a:avLst/>
+          </a:prstGeom>
+          <a:solidFill>
+            <a:srgbClr val="33322E"/>
+          </a:solidFill>
+          <a:ln>
+            <a:noFill/>
+          </a:ln>
+          <a:effectLst/>
+        </p:spPr>
+        <p:style>
+          <a:lnRef idx="1">
+            <a:schemeClr val="accent1"/>
+          </a:lnRef>
+          <a:fillRef idx="3">
+            <a:schemeClr val="accent1"/>
+          </a:fillRef>
+          <a:effectRef idx="2">
+            <a:schemeClr val="accent1"/>
+          </a:effectRef>
+          <a:fontRef idx="minor">
+            <a:schemeClr val="lt1"/>
+          </a:fontRef>
+        </p:style>
+        <p:txBody>
+          <a:bodyPr rtlCol="0" anchor="ctr"/>
+          <a:lstStyle/>
+          <a:p>
+            <a:pPr algn="ctr"/>
+          </a:p>
+        </p:txBody>
+      </p:sp>
+      <p:sp>
+        <p:nvSpPr>
+          <p:cNvPr id="26" name="Rectangle 25"/>
+          <p:cNvSpPr/>
+          <p:nvPr/>
+        </p:nvSpPr>
+        <p:spPr>
+          <a:xfrm>
+            <a:off x="6718250" y="2157412"/>
+            <a:ext cx="1317575" cy="9525"/>
+          </a:xfrm>
+          <a:prstGeom prst="rect">
+            <a:avLst/>
+          </a:prstGeom>
+          <a:solidFill>
+            <a:srgbClr val="DDE2D7"/>
+          </a:solidFill>
+          <a:ln>
+            <a:noFill/>
+          </a:ln>
+          <a:effectLst/>
+        </p:spPr>
+        <p:style>
+          <a:lnRef idx="1">
+            <a:schemeClr val="accent1"/>
+          </a:lnRef>
+          <a:fillRef idx="3">
+            <a:schemeClr val="accent1"/>
+          </a:fillRef>
+          <a:effectRef idx="2">
+            <a:schemeClr val="accent1"/>
+          </a:effectRef>
+          <a:fontRef idx="minor">
+            <a:schemeClr val="lt1"/>
+          </a:fontRef>
+        </p:style>
+        <p:txBody>
+          <a:bodyPr rtlCol="0" anchor="ctr"/>
+          <a:lstStyle/>
+          <a:p>
+            <a:pPr algn="ctr"/>
+          </a:p>
+        </p:txBody>
+      </p:sp>
+      <p:sp>
+        <p:nvSpPr>
+          <p:cNvPr id="27" name="Rectangle 26"/>
+          <p:cNvSpPr/>
+          <p:nvPr/>
+        </p:nvSpPr>
+        <p:spPr>
+          <a:xfrm>
+            <a:off x="6718250" y="3005138"/>
+            <a:ext cx="1317575" cy="9525"/>
+          </a:xfrm>
+          <a:prstGeom prst="rect">
+            <a:avLst/>
+          </a:prstGeom>
+          <a:solidFill>
+            <a:srgbClr val="DDE2D7"/>
+          </a:solidFill>
+          <a:ln>
+            <a:noFill/>
+          </a:ln>
+          <a:effectLst/>
+        </p:spPr>
+        <p:style>
+          <a:lnRef idx="1">
+            <a:schemeClr val="accent1"/>
+          </a:lnRef>
+          <a:fillRef idx="3">
+            <a:schemeClr val="accent1"/>
+          </a:fillRef>
+          <a:effectRef idx="2">
+            <a:schemeClr val="accent1"/>
+          </a:effectRef>
+          <a:fontRef idx="minor">
+            <a:schemeClr val="lt1"/>
+          </a:fontRef>
+        </p:style>
+        <p:txBody>
+          <a:bodyPr rtlCol="0" anchor="ctr"/>
+          <a:lstStyle/>
+          <a:p>
+            <a:pPr algn="ctr"/>
+          </a:p>
+        </p:txBody>
+      </p:sp>
+      <p:sp>
+        <p:nvSpPr>
+          <p:cNvPr id="28" name="Rectangle 27"/>
+          <p:cNvSpPr/>
+          <p:nvPr/>
+        </p:nvSpPr>
+        <p:spPr>
+          <a:xfrm>
+            <a:off x="6718250" y="2157412"/>
+            <a:ext cx="9525" cy="857250"/>
+          </a:xfrm>
+          <a:prstGeom prst="rect">
+            <a:avLst/>
+          </a:prstGeom>
+          <a:solidFill>
+            <a:srgbClr val="DDE2D7"/>
+          </a:solidFill>
+          <a:ln>
+            <a:noFill/>
+          </a:ln>
+          <a:effectLst/>
+        </p:spPr>
+        <p:style>
+          <a:lnRef idx="1">
+            <a:schemeClr val="accent1"/>
+          </a:lnRef>
+          <a:fillRef idx="3">
+            <a:schemeClr val="accent1"/>
+          </a:fillRef>
+          <a:effectRef idx="2">
+            <a:schemeClr val="accent1"/>
+          </a:effectRef>
+          <a:fontRef idx="minor">
+            <a:schemeClr val="lt1"/>
+          </a:fontRef>
+        </p:style>
+        <p:txBody>
+          <a:bodyPr rtlCol="0" anchor="ctr"/>
+          <a:lstStyle/>
+          <a:p>
+            <a:pPr algn="ctr"/>
+          </a:p>
+        </p:txBody>
+      </p:sp>
+      <p:sp>
+        <p:nvSpPr>
+          <p:cNvPr id="29" name="Rectangle 28"/>
+          <p:cNvSpPr/>
+          <p:nvPr/>
+        </p:nvSpPr>
+        <p:spPr>
+          <a:xfrm>
+            <a:off x="8026301" y="2157412"/>
+            <a:ext cx="9525" cy="857250"/>
+          </a:xfrm>
+          <a:prstGeom prst="rect">
+            <a:avLst/>
+          </a:prstGeom>
+          <a:solidFill>
+            <a:srgbClr val="DDE2D7"/>
+          </a:solidFill>
+          <a:ln>
+            <a:noFill/>
+          </a:ln>
+          <a:effectLst/>
+        </p:spPr>
+        <p:style>
+          <a:lnRef idx="1">
+            <a:schemeClr val="accent1"/>
+          </a:lnRef>
+          <a:fillRef idx="3">
+            <a:schemeClr val="accent1"/>
+          </a:fillRef>
+          <a:effectRef idx="2">
+            <a:schemeClr val="accent1"/>
+          </a:effectRef>
+          <a:fontRef idx="minor">
+            <a:schemeClr val="lt1"/>
+          </a:fontRef>
+        </p:style>
+        <p:txBody>
+          <a:bodyPr rtlCol="0" anchor="ctr"/>
+          <a:lstStyle/>
+          <a:p>
+            <a:pPr algn="ctr"/>
+          </a:p>
+        </p:txBody>
+      </p:sp>
+      <p:sp>
+        <p:nvSpPr>
+          <p:cNvPr id="30" name="Rectangle 29"/>
+          <p:cNvSpPr/>
+          <p:nvPr/>
+        </p:nvSpPr>
+        <p:spPr>
+          <a:xfrm>
+            <a:off x="8207276" y="2157412"/>
+            <a:ext cx="1317575" cy="857250"/>
+          </a:xfrm>
+          <a:prstGeom prst="rect">
+            <a:avLst/>
+          </a:prstGeom>
+          <a:solidFill>
+            <a:srgbClr val="8A867E"/>
+          </a:solidFill>
+          <a:ln>
+            <a:noFill/>
+          </a:ln>
+          <a:effectLst/>
+        </p:spPr>
+        <p:style>
+          <a:lnRef idx="1">
+            <a:schemeClr val="accent1"/>
+          </a:lnRef>
+          <a:fillRef idx="3">
+            <a:schemeClr val="accent1"/>
+          </a:fillRef>
+          <a:effectRef idx="2">
+            <a:schemeClr val="accent1"/>
+          </a:effectRef>
+          <a:fontRef idx="minor">
+            <a:schemeClr val="lt1"/>
+          </a:fontRef>
+        </p:style>
+        <p:txBody>
+          <a:bodyPr rtlCol="0" anchor="ctr"/>
+          <a:lstStyle/>
+          <a:p>
+            <a:pPr algn="ctr"/>
+          </a:p>
+        </p:txBody>
+      </p:sp>
+      <p:sp>
+        <p:nvSpPr>
+          <p:cNvPr id="31" name="Rectangle 30"/>
+          <p:cNvSpPr/>
+          <p:nvPr/>
+        </p:nvSpPr>
+        <p:spPr>
+          <a:xfrm>
+            <a:off x="8207276" y="2157412"/>
+            <a:ext cx="1317575" cy="9525"/>
+          </a:xfrm>
+          <a:prstGeom prst="rect">
+            <a:avLst/>
+          </a:prstGeom>
+          <a:solidFill>
+            <a:srgbClr val="DDE2D7"/>
+          </a:solidFill>
+          <a:ln>
+            <a:noFill/>
+          </a:ln>
+          <a:effectLst/>
+        </p:spPr>
+        <p:style>
+          <a:lnRef idx="1">
+            <a:schemeClr val="accent1"/>
+          </a:lnRef>
+          <a:fillRef idx="3">
+            <a:schemeClr val="accent1"/>
+          </a:fillRef>
+          <a:effectRef idx="2">
+            <a:schemeClr val="accent1"/>
+          </a:effectRef>
+          <a:fontRef idx="minor">
+            <a:schemeClr val="lt1"/>
+          </a:fontRef>
+        </p:style>
+        <p:txBody>
+          <a:bodyPr rtlCol="0" anchor="ctr"/>
+          <a:lstStyle/>
+          <a:p>
+            <a:pPr algn="ctr"/>
+          </a:p>
+        </p:txBody>
+      </p:sp>
+      <p:sp>
+        <p:nvSpPr>
+          <p:cNvPr id="32" name="Rectangle 31"/>
+          <p:cNvSpPr/>
+          <p:nvPr/>
+        </p:nvSpPr>
+        <p:spPr>
+          <a:xfrm>
+            <a:off x="8207276" y="3005138"/>
+            <a:ext cx="1317575" cy="9525"/>
+          </a:xfrm>
+          <a:prstGeom prst="rect">
+            <a:avLst/>
+          </a:prstGeom>
+          <a:solidFill>
+            <a:srgbClr val="DDE2D7"/>
+          </a:solidFill>
+          <a:ln>
+            <a:noFill/>
+          </a:ln>
+          <a:effectLst/>
+        </p:spPr>
+        <p:style>
+          <a:lnRef idx="1">
+            <a:schemeClr val="accent1"/>
+          </a:lnRef>
+          <a:fillRef idx="3">
+            <a:schemeClr val="accent1"/>
+          </a:fillRef>
+          <a:effectRef idx="2">
+            <a:schemeClr val="accent1"/>
+          </a:effectRef>
+          <a:fontRef idx="minor">
+            <a:schemeClr val="lt1"/>
+          </a:fontRef>
+        </p:style>
+        <p:txBody>
+          <a:bodyPr rtlCol="0" anchor="ctr"/>
+          <a:lstStyle/>
+          <a:p>
+            <a:pPr algn="ctr"/>
+          </a:p>
+        </p:txBody>
+      </p:sp>
+      <p:sp>
+        <p:nvSpPr>
+          <p:cNvPr id="33" name="Rectangle 32"/>
+          <p:cNvSpPr/>
+          <p:nvPr/>
+        </p:nvSpPr>
+        <p:spPr>
+          <a:xfrm>
+            <a:off x="8207276" y="2157412"/>
+            <a:ext cx="9525" cy="857250"/>
+          </a:xfrm>
+          <a:prstGeom prst="rect">
+            <a:avLst/>
+          </a:prstGeom>
+          <a:solidFill>
+            <a:srgbClr val="DDE2D7"/>
+          </a:solidFill>
+          <a:ln>
+            <a:noFill/>
+          </a:ln>
+          <a:effectLst/>
+        </p:spPr>
+        <p:style>
+          <a:lnRef idx="1">
+            <a:schemeClr val="accent1"/>
+          </a:lnRef>
+          <a:fillRef idx="3">
+            <a:schemeClr val="accent1"/>
+          </a:fillRef>
+          <a:effectRef idx="2">
+            <a:schemeClr val="accent1"/>
+          </a:effectRef>
+          <a:fontRef idx="minor">
+            <a:schemeClr val="lt1"/>
+          </a:fontRef>
+        </p:style>
+        <p:txBody>
+          <a:bodyPr rtlCol="0" anchor="ctr"/>
+          <a:lstStyle/>
+          <a:p>
+            <a:pPr algn="ctr"/>
+          </a:p>
+        </p:txBody>
+      </p:sp>
+      <p:sp>
+        <p:nvSpPr>
+          <p:cNvPr id="34" name="Rectangle 33"/>
+          <p:cNvSpPr/>
+          <p:nvPr/>
+        </p:nvSpPr>
+        <p:spPr>
+          <a:xfrm>
+            <a:off x="9515326" y="2157412"/>
+            <a:ext cx="9525" cy="857250"/>
+          </a:xfrm>
+          <a:prstGeom prst="rect">
+            <a:avLst/>
+          </a:prstGeom>
+          <a:solidFill>
+            <a:srgbClr val="DDE2D7"/>
+          </a:solidFill>
+          <a:ln>
+            <a:noFill/>
+          </a:ln>
+          <a:effectLst/>
+        </p:spPr>
+        <p:style>
+          <a:lnRef idx="1">
+            <a:schemeClr val="accent1"/>
+          </a:lnRef>
+          <a:fillRef idx="3">
+            <a:schemeClr val="accent1"/>
+          </a:fillRef>
+          <a:effectRef idx="2">
+            <a:schemeClr val="accent1"/>
+          </a:effectRef>
+          <a:fontRef idx="minor">
+            <a:schemeClr val="lt1"/>
+          </a:fontRef>
+        </p:style>
+        <p:txBody>
+          <a:bodyPr rtlCol="0" anchor="ctr"/>
+          <a:lstStyle/>
+          <a:p>
+            <a:pPr algn="ctr"/>
+          </a:p>
+        </p:txBody>
+      </p:sp>
+      <p:sp>
+        <p:nvSpPr>
+          <p:cNvPr id="35" name="Rectangle 34"/>
+          <p:cNvSpPr/>
+          <p:nvPr/>
+        </p:nvSpPr>
+        <p:spPr>
+          <a:xfrm>
+            <a:off x="762000" y="9267825"/>
+            <a:ext cx="8763000" cy="9525"/>
+          </a:xfrm>
+          <a:prstGeom prst="rect">
+            <a:avLst/>
+          </a:prstGeom>
+          <a:solidFill>
+            <a:srgbClr val="C9D2C2"/>
+          </a:solidFill>
+          <a:ln>
+            <a:noFill/>
+          </a:ln>
+          <a:effectLst/>
+        </p:spPr>
+        <p:style>
+          <a:lnRef idx="1">
+            <a:schemeClr val="accent1"/>
+          </a:lnRef>
+          <a:fillRef idx="3">
+            <a:schemeClr val="accent1"/>
+          </a:fillRef>
+          <a:effectRef idx="2">
+            <a:schemeClr val="accent1"/>
+          </a:effectRef>
+          <a:fontRef idx="minor">
+            <a:schemeClr val="lt1"/>
+          </a:fontRef>
+        </p:style>
+        <p:txBody>
+          <a:bodyPr rtlCol="0" anchor="ctr"/>
+          <a:lstStyle/>
+          <a:p>
+            <a:pPr algn="ctr"/>
+          </a:p>
+        </p:txBody>
+      </p:sp>
+      <p:sp>
+        <p:nvSpPr>
+          <p:cNvPr id="36" name="TextBox 35"/>
+          <p:cNvSpPr txBox="1"/>
+          <p:nvPr/>
+        </p:nvSpPr>
+        <p:spPr>
+          <a:xfrm>
+            <a:off x="3926205" y="804862"/>
+            <a:ext cx="2434590" cy="171450"/>
+          </a:xfrm>
+          <a:prstGeom prst="rect">
+            <a:avLst/>
+          </a:prstGeom>
+          <a:noFill/>
+        </p:spPr>
+        <p:txBody>
+          <a:bodyPr wrap="none" anchor="t" lIns="0" rIns="0" tIns="0" bIns="0"/>
+          <a:lstStyle/>
+          <a:p>
+            <a:pPr algn="ctr"/>
+            <a:r>
+              <a:rPr sz="900" i="0" b="0" spc="378">
+                <a:solidFill>
+                  <a:srgbClr val="97A98C"/>
+                </a:solidFill>
+                <a:latin typeface="Poppins"/>
+                <a:ea typeface="Poppins"/>
+                <a:cs typeface="Poppins"/>
+              </a:rPr>
+              <a:t>BRAND GUIDE</a:t>
+            </a:r>
+          </a:p>
+        </p:txBody>
+      </p:sp>
+      <p:sp>
+        <p:nvSpPr>
+          <p:cNvPr id="37" name="TextBox 36"/>
+          <p:cNvSpPr txBox="1"/>
+          <p:nvPr/>
+        </p:nvSpPr>
+        <p:spPr>
+          <a:xfrm>
+            <a:off x="-2057400" y="1147762"/>
+            <a:ext cx="14401800" cy="590550"/>
+          </a:xfrm>
+          <a:prstGeom prst="rect">
+            <a:avLst/>
+          </a:prstGeom>
+          <a:noFill/>
+        </p:spPr>
+        <p:txBody>
+          <a:bodyPr wrap="none" anchor="t" lIns="0" rIns="0" tIns="0" bIns="0"/>
+          <a:lstStyle/>
+          <a:p>
+            <a:pPr algn="ctr"/>
+            <a:r>
+              <a:rPr sz="4050" i="1" b="0">
+                <a:solidFill>
+                  <a:srgbClr val="33322E"/>
+                </a:solidFill>
+                <a:latin typeface="Cormorant Garamond"/>
+                <a:ea typeface="Cormorant Garamond"/>
+                <a:cs typeface="Cormorant Garamond"/>
+              </a:rPr>
+              <a:t>Palette &amp; Type</a:t>
+            </a:r>
+          </a:p>
+        </p:txBody>
+      </p:sp>
+      <p:sp>
+        <p:nvSpPr>
+          <p:cNvPr id="38" name="TextBox 37"/>
+          <p:cNvSpPr txBox="1"/>
+          <p:nvPr/>
+        </p:nvSpPr>
+        <p:spPr>
+          <a:xfrm>
+            <a:off x="176227" y="3109912"/>
+            <a:ext cx="2489121" cy="123825"/>
+          </a:xfrm>
+          <a:prstGeom prst="rect">
+            <a:avLst/>
+          </a:prstGeom>
+          <a:noFill/>
+        </p:spPr>
+        <p:txBody>
+          <a:bodyPr wrap="none" anchor="t" lIns="0" rIns="0" tIns="0" bIns="0"/>
+          <a:lstStyle/>
+          <a:p>
+            <a:pPr algn="ctr"/>
+            <a:r>
+              <a:rPr sz="675" i="0" b="0" spc="108">
+                <a:solidFill>
+                  <a:srgbClr val="8A867E"/>
+                </a:solidFill>
+                <a:latin typeface="Poppins"/>
+                <a:ea typeface="Poppins"/>
+                <a:cs typeface="Poppins"/>
+              </a:rPr>
+              <a:t>#FBFAF7</a:t>
+            </a:r>
+          </a:p>
+        </p:txBody>
+      </p:sp>
+      <p:sp>
+        <p:nvSpPr>
+          <p:cNvPr id="39" name="TextBox 38"/>
+          <p:cNvSpPr txBox="1"/>
+          <p:nvPr/>
+        </p:nvSpPr>
+        <p:spPr>
+          <a:xfrm>
+            <a:off x="1665253" y="3109912"/>
+            <a:ext cx="2489121" cy="123825"/>
+          </a:xfrm>
+          <a:prstGeom prst="rect">
+            <a:avLst/>
+          </a:prstGeom>
+          <a:noFill/>
+        </p:spPr>
+        <p:txBody>
+          <a:bodyPr wrap="none" anchor="t" lIns="0" rIns="0" tIns="0" bIns="0"/>
+          <a:lstStyle/>
+          <a:p>
+            <a:pPr algn="ctr"/>
+            <a:r>
+              <a:rPr sz="675" i="0" b="0" spc="108">
+                <a:solidFill>
+                  <a:srgbClr val="8A867E"/>
+                </a:solidFill>
+                <a:latin typeface="Poppins"/>
+                <a:ea typeface="Poppins"/>
+                <a:cs typeface="Poppins"/>
+              </a:rPr>
+              <a:t>#EDE7DD</a:t>
+            </a:r>
+          </a:p>
+        </p:txBody>
+      </p:sp>
+      <p:sp>
+        <p:nvSpPr>
+          <p:cNvPr id="40" name="TextBox 39"/>
+          <p:cNvSpPr txBox="1"/>
+          <p:nvPr/>
+        </p:nvSpPr>
+        <p:spPr>
+          <a:xfrm>
+            <a:off x="3154278" y="3109912"/>
+            <a:ext cx="2489121" cy="123825"/>
+          </a:xfrm>
+          <a:prstGeom prst="rect">
+            <a:avLst/>
+          </a:prstGeom>
+          <a:noFill/>
+        </p:spPr>
+        <p:txBody>
+          <a:bodyPr wrap="none" anchor="t" lIns="0" rIns="0" tIns="0" bIns="0"/>
+          <a:lstStyle/>
+          <a:p>
+            <a:pPr algn="ctr"/>
+            <a:r>
+              <a:rPr sz="675" i="0" b="0" spc="108">
+                <a:solidFill>
+                  <a:srgbClr val="8A867E"/>
+                </a:solidFill>
+                <a:latin typeface="Poppins"/>
+                <a:ea typeface="Poppins"/>
+                <a:cs typeface="Poppins"/>
+              </a:rPr>
+              <a:t>#97A98C</a:t>
+            </a:r>
+          </a:p>
+        </p:txBody>
+      </p:sp>
+      <p:sp>
+        <p:nvSpPr>
+          <p:cNvPr id="41" name="TextBox 40"/>
+          <p:cNvSpPr txBox="1"/>
+          <p:nvPr/>
+        </p:nvSpPr>
+        <p:spPr>
+          <a:xfrm>
+            <a:off x="4643259" y="3109912"/>
+            <a:ext cx="2489359" cy="123825"/>
+          </a:xfrm>
+          <a:prstGeom prst="rect">
+            <a:avLst/>
+          </a:prstGeom>
+          <a:noFill/>
+        </p:spPr>
+        <p:txBody>
+          <a:bodyPr wrap="none" anchor="t" lIns="0" rIns="0" tIns="0" bIns="0"/>
+          <a:lstStyle/>
+          <a:p>
+            <a:pPr algn="ctr"/>
+            <a:r>
+              <a:rPr sz="675" i="0" b="0" spc="108">
+                <a:solidFill>
+                  <a:srgbClr val="8A867E"/>
+                </a:solidFill>
+                <a:latin typeface="Poppins"/>
+                <a:ea typeface="Poppins"/>
+                <a:cs typeface="Poppins"/>
+              </a:rPr>
+              <a:t>#E6D2CB</a:t>
+            </a:r>
+          </a:p>
+        </p:txBody>
+      </p:sp>
+      <p:sp>
+        <p:nvSpPr>
+          <p:cNvPr id="42" name="TextBox 41"/>
+          <p:cNvSpPr txBox="1"/>
+          <p:nvPr/>
+        </p:nvSpPr>
+        <p:spPr>
+          <a:xfrm>
+            <a:off x="6132478" y="3109912"/>
+            <a:ext cx="2489121" cy="123825"/>
+          </a:xfrm>
+          <a:prstGeom prst="rect">
+            <a:avLst/>
+          </a:prstGeom>
+          <a:noFill/>
+        </p:spPr>
+        <p:txBody>
+          <a:bodyPr wrap="none" anchor="t" lIns="0" rIns="0" tIns="0" bIns="0"/>
+          <a:lstStyle/>
+          <a:p>
+            <a:pPr algn="ctr"/>
+            <a:r>
+              <a:rPr sz="675" i="0" b="0" spc="108">
+                <a:solidFill>
+                  <a:srgbClr val="8A867E"/>
+                </a:solidFill>
+                <a:latin typeface="Poppins"/>
+                <a:ea typeface="Poppins"/>
+                <a:cs typeface="Poppins"/>
+              </a:rPr>
+              <a:t>#33322E</a:t>
+            </a:r>
+          </a:p>
+        </p:txBody>
+      </p:sp>
+      <p:sp>
+        <p:nvSpPr>
+          <p:cNvPr id="43" name="TextBox 42"/>
+          <p:cNvSpPr txBox="1"/>
+          <p:nvPr/>
+        </p:nvSpPr>
+        <p:spPr>
+          <a:xfrm>
+            <a:off x="7621503" y="3109912"/>
+            <a:ext cx="2489121" cy="123825"/>
+          </a:xfrm>
+          <a:prstGeom prst="rect">
+            <a:avLst/>
+          </a:prstGeom>
+          <a:noFill/>
+        </p:spPr>
+        <p:txBody>
+          <a:bodyPr wrap="none" anchor="t" lIns="0" rIns="0" tIns="0" bIns="0"/>
+          <a:lstStyle/>
+          <a:p>
+            <a:pPr algn="ctr"/>
+            <a:r>
+              <a:rPr sz="675" i="0" b="0" spc="108">
+                <a:solidFill>
+                  <a:srgbClr val="8A867E"/>
+                </a:solidFill>
+                <a:latin typeface="Poppins"/>
+                <a:ea typeface="Poppins"/>
+                <a:cs typeface="Poppins"/>
+              </a:rPr>
+              <a:t>#8A867E</a:t>
+            </a:r>
+          </a:p>
+        </p:txBody>
+      </p:sp>
+      <p:sp>
+        <p:nvSpPr>
+          <p:cNvPr id="44" name="TextBox 43"/>
+          <p:cNvSpPr txBox="1"/>
+          <p:nvPr/>
+        </p:nvSpPr>
+        <p:spPr>
+          <a:xfrm>
+            <a:off x="762000" y="3748088"/>
+            <a:ext cx="7086600" cy="152400"/>
+          </a:xfrm>
+          <a:prstGeom prst="rect">
+            <a:avLst/>
+          </a:prstGeom>
+          <a:noFill/>
+        </p:spPr>
+        <p:txBody>
+          <a:bodyPr wrap="none" anchor="t" lIns="0" rIns="0" tIns="0" bIns="0"/>
+          <a:lstStyle/>
+          <a:p>
+            <a:pPr algn="l"/>
+            <a:r>
+              <a:rPr sz="750" i="0" b="0" spc="225">
+                <a:solidFill>
+                  <a:srgbClr val="97A98C"/>
+                </a:solidFill>
+                <a:latin typeface="Poppins"/>
+                <a:ea typeface="Poppins"/>
+                <a:cs typeface="Poppins"/>
+              </a:rPr>
+              <a:t>DISPLAY</a:t>
+            </a:r>
+          </a:p>
+        </p:txBody>
+      </p:sp>
+      <p:sp>
+        <p:nvSpPr>
+          <p:cNvPr id="45" name="TextBox 44"/>
+          <p:cNvSpPr txBox="1"/>
+          <p:nvPr/>
+        </p:nvSpPr>
+        <p:spPr>
+          <a:xfrm>
+            <a:off x="762000" y="3995738"/>
+            <a:ext cx="7086600" cy="638175"/>
+          </a:xfrm>
+          <a:prstGeom prst="rect">
+            <a:avLst/>
+          </a:prstGeom>
+          <a:noFill/>
+        </p:spPr>
+        <p:txBody>
+          <a:bodyPr wrap="none" anchor="t" lIns="0" rIns="0" tIns="0" bIns="0"/>
+          <a:lstStyle/>
+          <a:p>
+            <a:pPr algn="l"/>
+            <a:r>
+              <a:rPr sz="4350" i="1" b="0">
+                <a:solidFill>
+                  <a:srgbClr val="33322E"/>
+                </a:solidFill>
+                <a:latin typeface="Cormorant Garamond"/>
+                <a:ea typeface="Cormorant Garamond"/>
+                <a:cs typeface="Cormorant Garamond"/>
+              </a:rPr>
+              <a:t>Cormorant</a:t>
+            </a:r>
+          </a:p>
+        </p:txBody>
+      </p:sp>
+      <p:sp>
+        <p:nvSpPr>
+          <p:cNvPr id="46" name="TextBox 45"/>
+          <p:cNvSpPr txBox="1"/>
+          <p:nvPr/>
+        </p:nvSpPr>
+        <p:spPr>
+          <a:xfrm>
+            <a:off x="762000" y="4691062"/>
+            <a:ext cx="7086600" cy="152400"/>
+          </a:xfrm>
+          <a:prstGeom prst="rect">
+            <a:avLst/>
+          </a:prstGeom>
+          <a:noFill/>
+        </p:spPr>
+        <p:txBody>
+          <a:bodyPr wrap="none" anchor="t" lIns="0" rIns="0" tIns="0" bIns="0"/>
+          <a:lstStyle/>
+          <a:p>
+            <a:pPr algn="l"/>
+            <a:r>
+              <a:rPr sz="750" i="0" b="0" spc="75">
+                <a:solidFill>
+                  <a:srgbClr val="8A867E"/>
+                </a:solidFill>
+                <a:latin typeface="Poppins"/>
+                <a:ea typeface="Poppins"/>
+                <a:cs typeface="Poppins"/>
+              </a:rPr>
+              <a:t>Garamond · Aa Bb Cc 123</a:t>
+            </a:r>
+          </a:p>
+        </p:txBody>
+      </p:sp>
+      <p:sp>
+        <p:nvSpPr>
+          <p:cNvPr id="47" name="TextBox 46"/>
+          <p:cNvSpPr txBox="1"/>
+          <p:nvPr/>
+        </p:nvSpPr>
+        <p:spPr>
+          <a:xfrm>
+            <a:off x="5334000" y="3748088"/>
+            <a:ext cx="7086600" cy="152400"/>
+          </a:xfrm>
+          <a:prstGeom prst="rect">
+            <a:avLst/>
+          </a:prstGeom>
+          <a:noFill/>
+        </p:spPr>
+        <p:txBody>
+          <a:bodyPr wrap="none" anchor="t" lIns="0" rIns="0" tIns="0" bIns="0"/>
+          <a:lstStyle/>
+          <a:p>
+            <a:pPr algn="l"/>
+            <a:r>
+              <a:rPr sz="750" i="0" b="0" spc="225">
+                <a:solidFill>
+                  <a:srgbClr val="97A98C"/>
+                </a:solidFill>
+                <a:latin typeface="Poppins"/>
+                <a:ea typeface="Poppins"/>
+                <a:cs typeface="Poppins"/>
+              </a:rPr>
+              <a:t>SUBHEAD</a:t>
+            </a:r>
+          </a:p>
+        </p:txBody>
+      </p:sp>
+      <p:sp>
+        <p:nvSpPr>
+          <p:cNvPr id="48" name="TextBox 47"/>
+          <p:cNvSpPr txBox="1"/>
+          <p:nvPr/>
+        </p:nvSpPr>
+        <p:spPr>
+          <a:xfrm>
+            <a:off x="5334000" y="3995738"/>
+            <a:ext cx="7086600" cy="571500"/>
+          </a:xfrm>
+          <a:prstGeom prst="rect">
+            <a:avLst/>
+          </a:prstGeom>
+          <a:noFill/>
+        </p:spPr>
+        <p:txBody>
+          <a:bodyPr wrap="none" anchor="t" lIns="0" rIns="0" tIns="0" bIns="0"/>
+          <a:lstStyle/>
+          <a:p>
+            <a:pPr algn="l"/>
+            <a:r>
+              <a:rPr sz="3000" i="0" b="0" spc="180">
+                <a:solidFill>
+                  <a:srgbClr val="33322E"/>
+                </a:solidFill>
+                <a:latin typeface="Poppins"/>
+                <a:ea typeface="Poppins"/>
+                <a:cs typeface="Poppins"/>
+              </a:rPr>
+              <a:t>Poppins</a:t>
+            </a:r>
+          </a:p>
+        </p:txBody>
+      </p:sp>
+      <p:sp>
+        <p:nvSpPr>
+          <p:cNvPr id="49" name="TextBox 48"/>
+          <p:cNvSpPr txBox="1"/>
+          <p:nvPr/>
+        </p:nvSpPr>
+        <p:spPr>
+          <a:xfrm>
+            <a:off x="5334000" y="4662488"/>
+            <a:ext cx="7086600" cy="152400"/>
+          </a:xfrm>
+          <a:prstGeom prst="rect">
+            <a:avLst/>
+          </a:prstGeom>
+          <a:noFill/>
+        </p:spPr>
+        <p:txBody>
+          <a:bodyPr wrap="none" anchor="t" lIns="0" rIns="0" tIns="0" bIns="0"/>
+          <a:lstStyle/>
+          <a:p>
+            <a:pPr algn="l"/>
+            <a:r>
+              <a:rPr sz="750" i="0" b="0" spc="75">
+                <a:solidFill>
+                  <a:srgbClr val="8A867E"/>
+                </a:solidFill>
+                <a:latin typeface="Poppins"/>
+                <a:ea typeface="Poppins"/>
+                <a:cs typeface="Poppins"/>
+              </a:rPr>
+              <a:t>Lato · body copy · Aa Bb 123</a:t>
+            </a:r>
+          </a:p>
+        </p:txBody>
+      </p:sp>
+      <p:sp>
+        <p:nvSpPr>
+          <p:cNvPr id="50" name="TextBox 49"/>
+          <p:cNvSpPr txBox="1"/>
+          <p:nvPr/>
+        </p:nvSpPr>
+        <p:spPr>
+          <a:xfrm>
+            <a:off x="-2057400" y="9467850"/>
+            <a:ext cx="14401800" cy="152400"/>
+          </a:xfrm>
+          <a:prstGeom prst="rect">
+            <a:avLst/>
+          </a:prstGeom>
+          <a:noFill/>
+        </p:spPr>
+        <p:txBody>
+          <a:bodyPr wrap="none" anchor="t" lIns="0" rIns="0" tIns="0" bIns="0"/>
+          <a:lstStyle/>
+          <a:p>
+            <a:pPr algn="ctr"/>
+            <a:r>
+              <a:rPr sz="750" i="0" b="0" spc="225">
+                <a:solidFill>
+                  <a:srgbClr val="8A867E"/>
+                </a:solidFill>
+                <a:latin typeface="Poppins"/>
+                <a:ea typeface="Poppins"/>
+                <a:cs typeface="Poppins"/>
+              </a:rPr>
+              <a:t>THE BRIGHT AGENT COLLECTION</a:t>
+            </a:r>
+          </a:p>
+        </p:txBody>
+      </p:sp>
     </p:spTree>
   </p:cSld>
   <p:clrMapOvr>
